--- a/deep_learning/notes_NLP/NLP_in_Finance/NLP_in_Finance.pptx
+++ b/deep_learning/notes_NLP/NLP_in_Finance/NLP_in_Finance.pptx
@@ -233,7 +233,7 @@
           <a:p>
             <a:fld id="{7BAEECA8-D063-486F-AE31-5020270C1449}" type="datetimeFigureOut">
               <a:rPr lang="en-US" smtClean="0"/>
-              <a:t>4/14/2026</a:t>
+              <a:t>7/19/2026</a:t>
             </a:fld>
             <a:endParaRPr lang="en-US"/>
           </a:p>
@@ -410,7 +410,7 @@
           <a:p>
             <a:fld id="{CB233BD1-3BA8-448D-9D08-7846095EA517}" type="datetimeFigureOut">
               <a:rPr lang="en-US" smtClean="0"/>
-              <a:t>4/14/2026</a:t>
+              <a:t>7/19/2026</a:t>
             </a:fld>
             <a:endParaRPr lang="en-US"/>
           </a:p>
@@ -824,7 +824,7 @@
           <a:p>
             <a:fld id="{6383FAE1-13DE-4511-8C1B-C8AFB720664C}" type="datetimeFigureOut">
               <a:rPr lang="en-US" smtClean="0"/>
-              <a:t>4/14/2026</a:t>
+              <a:t>7/19/2026</a:t>
             </a:fld>
             <a:endParaRPr lang="en-US"/>
           </a:p>
@@ -1022,7 +1022,7 @@
           <a:p>
             <a:fld id="{6383FAE1-13DE-4511-8C1B-C8AFB720664C}" type="datetimeFigureOut">
               <a:rPr lang="en-US" smtClean="0"/>
-              <a:t>4/14/2026</a:t>
+              <a:t>7/19/2026</a:t>
             </a:fld>
             <a:endParaRPr lang="en-US"/>
           </a:p>
@@ -1230,7 +1230,7 @@
           <a:p>
             <a:fld id="{6383FAE1-13DE-4511-8C1B-C8AFB720664C}" type="datetimeFigureOut">
               <a:rPr lang="en-US" smtClean="0"/>
-              <a:t>4/14/2026</a:t>
+              <a:t>7/19/2026</a:t>
             </a:fld>
             <a:endParaRPr lang="en-US"/>
           </a:p>
@@ -1428,7 +1428,7 @@
           <a:p>
             <a:fld id="{6383FAE1-13DE-4511-8C1B-C8AFB720664C}" type="datetimeFigureOut">
               <a:rPr lang="en-US" smtClean="0"/>
-              <a:t>4/14/2026</a:t>
+              <a:t>7/19/2026</a:t>
             </a:fld>
             <a:endParaRPr lang="en-US"/>
           </a:p>
@@ -1703,7 +1703,7 @@
           <a:p>
             <a:fld id="{6383FAE1-13DE-4511-8C1B-C8AFB720664C}" type="datetimeFigureOut">
               <a:rPr lang="en-US" smtClean="0"/>
-              <a:t>4/14/2026</a:t>
+              <a:t>7/19/2026</a:t>
             </a:fld>
             <a:endParaRPr lang="en-US"/>
           </a:p>
@@ -1968,7 +1968,7 @@
           <a:p>
             <a:fld id="{6383FAE1-13DE-4511-8C1B-C8AFB720664C}" type="datetimeFigureOut">
               <a:rPr lang="en-US" smtClean="0"/>
-              <a:t>4/14/2026</a:t>
+              <a:t>7/19/2026</a:t>
             </a:fld>
             <a:endParaRPr lang="en-US"/>
           </a:p>
@@ -2380,7 +2380,7 @@
           <a:p>
             <a:fld id="{6383FAE1-13DE-4511-8C1B-C8AFB720664C}" type="datetimeFigureOut">
               <a:rPr lang="en-US" smtClean="0"/>
-              <a:t>4/14/2026</a:t>
+              <a:t>7/19/2026</a:t>
             </a:fld>
             <a:endParaRPr lang="en-US"/>
           </a:p>
@@ -2521,7 +2521,7 @@
           <a:p>
             <a:fld id="{6383FAE1-13DE-4511-8C1B-C8AFB720664C}" type="datetimeFigureOut">
               <a:rPr lang="en-US" smtClean="0"/>
-              <a:t>4/14/2026</a:t>
+              <a:t>7/19/2026</a:t>
             </a:fld>
             <a:endParaRPr lang="en-US"/>
           </a:p>
@@ -2634,7 +2634,7 @@
           <a:p>
             <a:fld id="{6383FAE1-13DE-4511-8C1B-C8AFB720664C}" type="datetimeFigureOut">
               <a:rPr lang="en-US" smtClean="0"/>
-              <a:t>4/14/2026</a:t>
+              <a:t>7/19/2026</a:t>
             </a:fld>
             <a:endParaRPr lang="en-US"/>
           </a:p>
@@ -2945,7 +2945,7 @@
           <a:p>
             <a:fld id="{6383FAE1-13DE-4511-8C1B-C8AFB720664C}" type="datetimeFigureOut">
               <a:rPr lang="en-US" smtClean="0"/>
-              <a:t>4/14/2026</a:t>
+              <a:t>7/19/2026</a:t>
             </a:fld>
             <a:endParaRPr lang="en-US"/>
           </a:p>
@@ -3236,7 +3236,7 @@
           <a:p>
             <a:fld id="{6383FAE1-13DE-4511-8C1B-C8AFB720664C}" type="datetimeFigureOut">
               <a:rPr lang="en-US" smtClean="0"/>
-              <a:t>4/14/2026</a:t>
+              <a:t>7/19/2026</a:t>
             </a:fld>
             <a:endParaRPr lang="en-US"/>
           </a:p>
@@ -3480,7 +3480,7 @@
           <a:p>
             <a:fld id="{6383FAE1-13DE-4511-8C1B-C8AFB720664C}" type="datetimeFigureOut">
               <a:rPr lang="en-US" smtClean="0"/>
-              <a:t>4/14/2026</a:t>
+              <a:t>7/19/2026</a:t>
             </a:fld>
             <a:endParaRPr lang="en-US"/>
           </a:p>
@@ -4254,7 +4254,7 @@
         <p:spPr>
           <a:xfrm>
             <a:off x="669036" y="4208240"/>
-            <a:ext cx="6190488" cy="1938992"/>
+            <a:ext cx="11145012" cy="1938992"/>
           </a:xfrm>
           <a:prstGeom prst="rect">
             <a:avLst/>
@@ -4288,6 +4288,17 @@
               <a:buChar char="•"/>
             </a:pPr>
             <a:r>
+              <a:rPr lang="en-US" sz="2400" b="1" dirty="0">
+                <a:solidFill>
+                  <a:schemeClr val="accent6">
+                    <a:lumMod val="60000"/>
+                    <a:lumOff val="40000"/>
+                  </a:schemeClr>
+                </a:solidFill>
+              </a:rPr>
+              <a:t>Slang</a:t>
+            </a:r>
+            <a:r>
               <a:rPr lang="en-US" sz="2400" dirty="0">
                 <a:solidFill>
                   <a:schemeClr val="accent6">
@@ -4296,7 +4307,29 @@
                   </a:schemeClr>
                 </a:solidFill>
               </a:rPr>
-              <a:t>Slang (🚀📉) </a:t>
+              <a:t> - “You said Apple is doing good. Yeah right ! </a:t>
+            </a:r>
+            <a:r>
+              <a:rPr lang="en-US" sz="2400" b="1" u="sng" dirty="0">
+                <a:solidFill>
+                  <a:schemeClr val="accent6">
+                    <a:lumMod val="60000"/>
+                    <a:lumOff val="40000"/>
+                  </a:schemeClr>
+                </a:solidFill>
+              </a:rPr>
+              <a:t>Only if Pigs can fly</a:t>
+            </a:r>
+            <a:r>
+              <a:rPr lang="en-US" sz="2400" dirty="0">
+                <a:solidFill>
+                  <a:schemeClr val="accent6">
+                    <a:lumMod val="60000"/>
+                    <a:lumOff val="40000"/>
+                  </a:schemeClr>
+                </a:solidFill>
+              </a:rPr>
+              <a:t>”</a:t>
             </a:r>
           </a:p>
           <a:p>
@@ -4305,6 +4338,17 @@
               <a:buChar char="•"/>
             </a:pPr>
             <a:r>
+              <a:rPr lang="en-US" sz="2400" b="1" dirty="0">
+                <a:solidFill>
+                  <a:schemeClr val="accent6">
+                    <a:lumMod val="60000"/>
+                    <a:lumOff val="40000"/>
+                  </a:schemeClr>
+                </a:solidFill>
+              </a:rPr>
+              <a:t>Short text </a:t>
+            </a:r>
+            <a:r>
               <a:rPr lang="en-US" sz="2400" dirty="0">
                 <a:solidFill>
                   <a:schemeClr val="accent6">
@@ -4313,7 +4357,7 @@
                   </a:schemeClr>
                 </a:solidFill>
               </a:rPr>
-              <a:t>Short text </a:t>
+              <a:t>– “OMG. Watch out for Tesla stocks.”</a:t>
             </a:r>
           </a:p>
           <a:p>
@@ -4322,6 +4366,17 @@
               <a:buChar char="•"/>
             </a:pPr>
             <a:r>
+              <a:rPr lang="en-US" sz="2400" b="1" dirty="0">
+                <a:solidFill>
+                  <a:schemeClr val="accent6">
+                    <a:lumMod val="60000"/>
+                    <a:lumOff val="40000"/>
+                  </a:schemeClr>
+                </a:solidFill>
+              </a:rPr>
+              <a:t>Noise</a:t>
+            </a:r>
+            <a:r>
               <a:rPr lang="en-US" sz="2400" dirty="0">
                 <a:solidFill>
                   <a:schemeClr val="accent6">
@@ -4330,8 +4385,27 @@
                   </a:schemeClr>
                 </a:solidFill>
               </a:rPr>
-              <a:t>Noise </a:t>
-            </a:r>
+              <a:t> – “I am going to swimming. BTW, Tesla went up. So, you  </a:t>
+            </a:r>
+            <a:r>
+              <a:rPr lang="en-US" sz="2400">
+                <a:solidFill>
+                  <a:schemeClr val="accent6">
+                    <a:lumMod val="60000"/>
+                    <a:lumOff val="40000"/>
+                  </a:schemeClr>
+                </a:solidFill>
+              </a:rPr>
+              <a:t>coming tomorrow.”</a:t>
+            </a:r>
+            <a:endParaRPr lang="en-US" sz="2400" dirty="0">
+              <a:solidFill>
+                <a:schemeClr val="accent6">
+                  <a:lumMod val="60000"/>
+                  <a:lumOff val="40000"/>
+                </a:schemeClr>
+              </a:solidFill>
+            </a:endParaRPr>
           </a:p>
           <a:p>
             <a:pPr marL="342900" indent="-342900">
@@ -4339,6 +4413,17 @@
               <a:buChar char="•"/>
             </a:pPr>
             <a:r>
+              <a:rPr lang="en-US" sz="2400" b="1" dirty="0">
+                <a:solidFill>
+                  <a:schemeClr val="accent6">
+                    <a:lumMod val="60000"/>
+                    <a:lumOff val="40000"/>
+                  </a:schemeClr>
+                </a:solidFill>
+              </a:rPr>
+              <a:t>Sarcasm</a:t>
+            </a:r>
+            <a:r>
               <a:rPr lang="en-US" sz="2400" dirty="0">
                 <a:solidFill>
                   <a:schemeClr val="accent6">
@@ -4347,7 +4432,29 @@
                   </a:schemeClr>
                 </a:solidFill>
               </a:rPr>
-              <a:t>Sarcasm</a:t>
+              <a:t> – “You said Apple is doing good. </a:t>
+            </a:r>
+            <a:r>
+              <a:rPr lang="en-US" sz="2400" b="1" u="sng" dirty="0">
+                <a:solidFill>
+                  <a:schemeClr val="accent6">
+                    <a:lumMod val="60000"/>
+                    <a:lumOff val="40000"/>
+                  </a:schemeClr>
+                </a:solidFill>
+              </a:rPr>
+              <a:t>Yeah right </a:t>
+            </a:r>
+            <a:r>
+              <a:rPr lang="en-US" sz="2400" dirty="0">
+                <a:solidFill>
+                  <a:schemeClr val="accent6">
+                    <a:lumMod val="60000"/>
+                    <a:lumOff val="40000"/>
+                  </a:schemeClr>
+                </a:solidFill>
+              </a:rPr>
+              <a:t>! Only if Pigs can fly”</a:t>
             </a:r>
           </a:p>
         </p:txBody>
